--- a/presentations/OWERF_Project_Presentation.pptx
+++ b/presentations/OWERF_Project_Presentation.pptx
@@ -3154,12 +3154,12 @@
               <a:buNone/>
             </a:pPr>
             <a:r>
-              <a:rPr lang="en-US" sz="1400" dirty="0">
-                <a:solidFill>
-                  <a:schemeClr val="tx1"/>
-                </a:solidFill>
-              </a:rPr>
-              <a:t>B.Tech deep-learning project</a:t>
+              <a:rPr lang="en-US" sz="1100" dirty="0">
+                <a:solidFill>
+                  <a:schemeClr val="tx1"/>
+                </a:solidFill>
+              </a:rPr>
+              <a:t>Ishant Pant | Research Supervisor: Dr. Sandeep Gupta</a:t>
             </a:r>
             <a:endParaRPr lang="en-US" sz="1400" dirty="0"/>
           </a:p>
@@ -4423,7 +4423,7 @@
                   <a:schemeClr val="tx1"/>
                 </a:solidFill>
               </a:rPr>
-              <a:t>How it works in real life</a:t>
+              <a:t>Illustrative operational workflow</a:t>
             </a:r>
             <a:endParaRPr lang="en-US" sz="3400" dirty="0"/>
           </a:p>
